--- a/Submission deck.pptx
+++ b/Submission deck.pptx
@@ -12831,7 +12831,7 @@
           <a:lstStyle/>
           <a:p>
             <a:r>
-              <a:t>A Red Coach (Claude Opus) invents new attacks against your agents.</a:t>
+              <a:t>A Red Coach (a frontier LLM) invents new attacks against your agents.</a:t>
             </a:r>
           </a:p>
           <a:p>
@@ -13756,7 +13756,7 @@
                     <a:p>
                       <a:r>
                         <a:rPr sz="1100"/>
-                        <a:t>Claude Opus 4.7, LangGraph, React 19 + Vite, @uipath/uipath-typescript SDK, OWASP LLM Top-10, MITRE ATLAS, built with Claude Code</a:t>
+                        <a:t>Frontier LLM, LangGraph, React 19 + Vite, @uipath/uipath-typescript SDK, OWASP LLM Top-10, MITRE ATLAS, built with an agentic coding tool</a:t>
                       </a:r>
                     </a:p>
                   </a:txBody>
@@ -15540,7 +15540,7 @@
                   <a:srgbClr val="172125"/>
                 </a:solidFill>
               </a:rPr>
-              <a:t>or ask Opus to invent a new one.</a:t>
+              <a:t>or ask the LLM to invent a new one.</a:t>
             </a:r>
           </a:p>
           <a:p/>
@@ -16404,7 +16404,7 @@
                   <a:srgbClr val="172125"/>
                 </a:solidFill>
               </a:rPr>
-              <a:t>Coach Lab streams a real Opus call from the browser using the user's own session key. The persona is authored during the demo, not pre-recorded.</a:t>
+              <a:t>Coach Lab streams a real LLM call from the browser using the user's own session key. The persona is authored during the demo, not pre-recorded.</a:t>
             </a:r>
           </a:p>
           <a:p/>
@@ -16415,7 +16415,7 @@
                   <a:srgbClr val="172125"/>
                 </a:solidFill>
               </a:rPr>
-              <a:t>Built end-to-end with Claude Code.</a:t>
+              <a:t>Built end-to-end with an agentic coding tool.</a:t>
             </a:r>
           </a:p>
           <a:p/>
